--- a/Reporte 030626.pptx
+++ b/Reporte 030626.pptx
@@ -6276,10 +6276,10 @@
       </p:sp>
       <p:pic>
         <p:nvPicPr>
-          <p:cNvPr id="4" name="Imagen 3">
+          <p:cNvPr id="5" name="Imagen 4">
             <a:extLst>
               <a:ext uri="{FF2B5EF4-FFF2-40B4-BE49-F238E27FC236}">
-                <a16:creationId xmlns:a16="http://schemas.microsoft.com/office/drawing/2014/main" id="{C470D902-604E-A372-1C49-30A7527ADF82}"/>
+                <a16:creationId xmlns:a16="http://schemas.microsoft.com/office/drawing/2014/main" id="{A1285007-E81A-89D9-1585-59572B3B2676}"/>
               </a:ext>
             </a:extLst>
           </p:cNvPr>
@@ -6296,8 +6296,8 @@
         </p:blipFill>
         <p:spPr>
           <a:xfrm>
-            <a:off x="0" y="872893"/>
-            <a:ext cx="9144000" cy="3540589"/>
+            <a:off x="0" y="855354"/>
+            <a:ext cx="9144000" cy="3575668"/>
           </a:xfrm>
           <a:prstGeom prst="rect">
             <a:avLst/>
@@ -6374,10 +6374,10 @@
       </p:sp>
       <p:pic>
         <p:nvPicPr>
-          <p:cNvPr id="3" name="Imagen 2">
+          <p:cNvPr id="4" name="Imagen 3">
             <a:extLst>
               <a:ext uri="{FF2B5EF4-FFF2-40B4-BE49-F238E27FC236}">
-                <a16:creationId xmlns:a16="http://schemas.microsoft.com/office/drawing/2014/main" id="{12536DA5-4664-1776-A7CC-8CEDFABBD892}"/>
+                <a16:creationId xmlns:a16="http://schemas.microsoft.com/office/drawing/2014/main" id="{D68629CF-AAE3-55BD-08A6-1F4DFAE170A3}"/>
               </a:ext>
             </a:extLst>
           </p:cNvPr>
@@ -6394,8 +6394,8 @@
         </p:blipFill>
         <p:spPr>
           <a:xfrm>
-            <a:off x="0" y="1361718"/>
-            <a:ext cx="9144000" cy="2562939"/>
+            <a:off x="0" y="1356532"/>
+            <a:ext cx="9144000" cy="2573312"/>
           </a:xfrm>
           <a:prstGeom prst="rect">
             <a:avLst/>
@@ -6478,10 +6478,10 @@
       </p:sp>
       <p:pic>
         <p:nvPicPr>
-          <p:cNvPr id="4" name="Imagen 3">
+          <p:cNvPr id="3" name="Imagen 2">
             <a:extLst>
               <a:ext uri="{FF2B5EF4-FFF2-40B4-BE49-F238E27FC236}">
-                <a16:creationId xmlns:a16="http://schemas.microsoft.com/office/drawing/2014/main" id="{F11CE18C-9DD3-0D61-9469-478F52C38835}"/>
+                <a16:creationId xmlns:a16="http://schemas.microsoft.com/office/drawing/2014/main" id="{F57BD724-C70B-8A96-157E-339F0293BA09}"/>
               </a:ext>
             </a:extLst>
           </p:cNvPr>
@@ -6498,8 +6498,8 @@
         </p:blipFill>
         <p:spPr>
           <a:xfrm>
-            <a:off x="0" y="654351"/>
-            <a:ext cx="9144000" cy="3977673"/>
+            <a:off x="0" y="994876"/>
+            <a:ext cx="9144000" cy="3296623"/>
           </a:xfrm>
           <a:prstGeom prst="rect">
             <a:avLst/>
@@ -6576,10 +6576,10 @@
       </p:sp>
       <p:pic>
         <p:nvPicPr>
-          <p:cNvPr id="4" name="Imagen 3">
+          <p:cNvPr id="5" name="Imagen 4">
             <a:extLst>
               <a:ext uri="{FF2B5EF4-FFF2-40B4-BE49-F238E27FC236}">
-                <a16:creationId xmlns:a16="http://schemas.microsoft.com/office/drawing/2014/main" id="{0DADCF4E-6074-C14E-53B2-255529F9E7F3}"/>
+                <a16:creationId xmlns:a16="http://schemas.microsoft.com/office/drawing/2014/main" id="{2AD015F3-D079-ED61-D13F-B55B5597D1D2}"/>
               </a:ext>
             </a:extLst>
           </p:cNvPr>
@@ -6596,8 +6596,8 @@
         </p:blipFill>
         <p:spPr>
           <a:xfrm>
-            <a:off x="0" y="1269311"/>
-            <a:ext cx="9144000" cy="2747754"/>
+            <a:off x="-6725" y="1300995"/>
+            <a:ext cx="9144000" cy="2684385"/>
           </a:xfrm>
           <a:prstGeom prst="rect">
             <a:avLst/>
@@ -6674,10 +6674,10 @@
       </p:sp>
       <p:pic>
         <p:nvPicPr>
-          <p:cNvPr id="4" name="Imagen 3">
+          <p:cNvPr id="3" name="Imagen 2">
             <a:extLst>
               <a:ext uri="{FF2B5EF4-FFF2-40B4-BE49-F238E27FC236}">
-                <a16:creationId xmlns:a16="http://schemas.microsoft.com/office/drawing/2014/main" id="{C9FB3827-0ACE-B505-ADAB-FC48A69655FC}"/>
+                <a16:creationId xmlns:a16="http://schemas.microsoft.com/office/drawing/2014/main" id="{833E14B0-8970-0516-C168-00B44667EF9D}"/>
               </a:ext>
             </a:extLst>
           </p:cNvPr>
@@ -6694,8 +6694,8 @@
         </p:blipFill>
         <p:spPr>
           <a:xfrm>
-            <a:off x="0" y="1591022"/>
-            <a:ext cx="9144000" cy="2104331"/>
+            <a:off x="0" y="725816"/>
+            <a:ext cx="9144000" cy="3834743"/>
           </a:xfrm>
           <a:prstGeom prst="rect">
             <a:avLst/>
@@ -6772,10 +6772,10 @@
       </p:sp>
       <p:pic>
         <p:nvPicPr>
-          <p:cNvPr id="5" name="Imagen 4">
+          <p:cNvPr id="3" name="Imagen 2">
             <a:extLst>
               <a:ext uri="{FF2B5EF4-FFF2-40B4-BE49-F238E27FC236}">
-                <a16:creationId xmlns:a16="http://schemas.microsoft.com/office/drawing/2014/main" id="{0572DEB3-9B30-87BA-0DBB-17DD945F69FA}"/>
+                <a16:creationId xmlns:a16="http://schemas.microsoft.com/office/drawing/2014/main" id="{B441F7E7-7B36-CAED-47A2-855C059BFB69}"/>
               </a:ext>
             </a:extLst>
           </p:cNvPr>
@@ -6792,8 +6792,8 @@
         </p:blipFill>
         <p:spPr>
           <a:xfrm>
-            <a:off x="0" y="912380"/>
-            <a:ext cx="9144000" cy="3318739"/>
+            <a:off x="0" y="1617435"/>
+            <a:ext cx="9144000" cy="2051506"/>
           </a:xfrm>
           <a:prstGeom prst="rect">
             <a:avLst/>
